--- a/07_Final_ppt/OncoBio_Decision_Analytics.pptx
+++ b/07_Final_ppt/OncoBio_Decision_Analytics.pptx
@@ -3322,6 +3322,210 @@
     <p:extLst>
       <p:ext uri="{BB962C8B-B14F-4D97-AF65-F5344CB8AC3E}">
         <p14:creationId xmlns:p14="http://schemas.microsoft.com/office/powerpoint/2010/main" val="1024086991"/>
+      </p:ext>
+    </p:extLst>
+  </p:cSld>
+  <p:clrMapOvr>
+    <a:masterClrMapping/>
+  </p:clrMapOvr>
+</p:notes>
+</file>
+
+<file path=ppt/notesSlides/notesSlide20.xml><?xml version="1.0" encoding="utf-8"?>
+<p:notes xmlns:a="http://schemas.openxmlformats.org/drawingml/2006/main" xmlns:r="http://schemas.openxmlformats.org/officeDocument/2006/relationships" xmlns:p="http://schemas.openxmlformats.org/presentationml/2006/main">
+  <p:cSld>
+    <p:spTree>
+      <p:nvGrpSpPr>
+        <p:cNvPr id="1" name=""/>
+        <p:cNvGrpSpPr/>
+        <p:nvPr/>
+      </p:nvGrpSpPr>
+      <p:grpSpPr>
+        <a:xfrm>
+          <a:off x="0" y="0"/>
+          <a:ext cx="0" cy="0"/>
+          <a:chOff x="0" y="0"/>
+          <a:chExt cx="0" cy="0"/>
+        </a:xfrm>
+      </p:grpSpPr>
+      <p:sp>
+        <p:nvSpPr>
+          <p:cNvPr id="2" name="Espace réservé de l'image des diapositives 1"/>
+          <p:cNvSpPr>
+            <a:spLocks noGrp="1" noRot="1" noChangeAspect="1"/>
+          </p:cNvSpPr>
+          <p:nvPr>
+            <p:ph type="sldImg"/>
+          </p:nvPr>
+        </p:nvSpPr>
+        <p:spPr>
+          <a:xfrm>
+            <a:off x="-171450" y="1143000"/>
+            <a:ext cx="5486400" cy="3086100"/>
+          </a:xfrm>
+          <a:prstGeom prst="rect">
+            <a:avLst/>
+          </a:prstGeom>
+          <a:noFill/>
+          <a:ln w="12700">
+            <a:solidFill>
+              <a:prstClr val="black"/>
+            </a:solidFill>
+          </a:ln>
+        </p:spPr>
+      </p:sp>
+      <p:sp>
+        <p:nvSpPr>
+          <p:cNvPr id="3" name="Espace réservé des notes 2"/>
+          <p:cNvSpPr>
+            <a:spLocks noGrp="1"/>
+          </p:cNvSpPr>
+          <p:nvPr>
+            <p:ph type="body" idx="1"/>
+          </p:nvPr>
+        </p:nvSpPr>
+        <p:spPr>
+          <a:xfrm>
+            <a:off x="514350" y="4400550"/>
+            <a:ext cx="4114800" cy="3600450"/>
+          </a:xfrm>
+          <a:prstGeom prst="rect">
+            <a:avLst/>
+          </a:prstGeom>
+        </p:spPr>
+        <p:txBody>
+          <a:bodyPr/>
+          <a:lstStyle/>
+          <a:p>
+            <a:r>
+              <a:rPr lang="fr-MA" sz="1200" kern="1200" dirty="0">
+                <a:solidFill>
+                  <a:schemeClr val="tx1"/>
+                </a:solidFill>
+                <a:effectLst/>
+                <a:latin typeface="+mn-lt"/>
+                <a:ea typeface="+mn-ea"/>
+                <a:cs typeface="+mn-cs"/>
+              </a:rPr>
+              <a:t>Je tiens à exprimer ma profonde gratitude envers toutes les personnes qui ont contribué, de près ou de loin, à la réalisation de ce projet.</a:t>
+            </a:r>
+          </a:p>
+          <a:p>
+            <a:r>
+              <a:rPr lang="fr-MA" sz="1200" kern="1200" dirty="0">
+                <a:solidFill>
+                  <a:schemeClr val="tx1"/>
+                </a:solidFill>
+                <a:effectLst/>
+                <a:latin typeface="+mn-lt"/>
+                <a:ea typeface="+mn-ea"/>
+                <a:cs typeface="+mn-cs"/>
+              </a:rPr>
+              <a:t>En premier lieu, mes remerciements les plus sincères vont à </a:t>
+            </a:r>
+            <a:r>
+              <a:rPr lang="fr-MA" sz="1200" b="1" kern="1200" dirty="0">
+                <a:solidFill>
+                  <a:schemeClr val="tx1"/>
+                </a:solidFill>
+                <a:effectLst/>
+                <a:latin typeface="+mn-lt"/>
+                <a:ea typeface="+mn-ea"/>
+                <a:cs typeface="+mn-cs"/>
+              </a:rPr>
+              <a:t>Monsieur AMMANI Yassine</a:t>
+            </a:r>
+            <a:r>
+              <a:rPr lang="fr-MA" sz="1200" kern="1200" dirty="0">
+                <a:solidFill>
+                  <a:schemeClr val="tx1"/>
+                </a:solidFill>
+                <a:effectLst/>
+                <a:latin typeface="+mn-lt"/>
+                <a:ea typeface="+mn-ea"/>
+                <a:cs typeface="+mn-cs"/>
+              </a:rPr>
+              <a:t>, encadrant de ce projet, pour ses conseils avisés, sa disponibilité et sa bienveillance tout au long de cette formation. Son expertise et ses retours constructifs ont été déterminants dans la structuration et la qualité du travail produit.</a:t>
+            </a:r>
+          </a:p>
+          <a:p>
+            <a:r>
+              <a:rPr lang="fr-MA" sz="1200" kern="1200" dirty="0">
+                <a:solidFill>
+                  <a:schemeClr val="tx1"/>
+                </a:solidFill>
+                <a:effectLst/>
+                <a:latin typeface="+mn-lt"/>
+                <a:ea typeface="+mn-ea"/>
+                <a:cs typeface="+mn-cs"/>
+              </a:rPr>
+              <a:t>Je remercie également l'équipe pédagogique de </a:t>
+            </a:r>
+            <a:r>
+              <a:rPr lang="fr-MA" sz="1200" b="1" kern="1200" dirty="0">
+                <a:solidFill>
+                  <a:schemeClr val="tx1"/>
+                </a:solidFill>
+                <a:effectLst/>
+                <a:latin typeface="+mn-lt"/>
+                <a:ea typeface="+mn-ea"/>
+                <a:cs typeface="+mn-cs"/>
+              </a:rPr>
+              <a:t>Simplon</a:t>
+            </a:r>
+            <a:r>
+              <a:rPr lang="fr-MA" sz="1200" kern="1200" dirty="0">
+                <a:solidFill>
+                  <a:schemeClr val="tx1"/>
+                </a:solidFill>
+                <a:effectLst/>
+                <a:latin typeface="+mn-lt"/>
+                <a:ea typeface="+mn-ea"/>
+                <a:cs typeface="+mn-cs"/>
+              </a:rPr>
+              <a:t>, pour la qualité de la formation dispensée, les ressources mises à disposition et l'accompagnement constant tout au long de cette année. Cette formation a été une véritable opportunité de développer des compétences techniques solides et une vision métier orientée vers la donnée.</a:t>
+            </a:r>
+          </a:p>
+          <a:p>
+            <a:pPr marL="0" marR="0" lvl="0" indent="0" algn="l" defTabSz="914400" rtl="0" eaLnBrk="1" fontAlgn="auto" latinLnBrk="0" hangingPunct="1">
+              <a:lnSpc>
+                <a:spcPct val="100000"/>
+              </a:lnSpc>
+              <a:spcBef>
+                <a:spcPts val="0"/>
+              </a:spcBef>
+              <a:spcAft>
+                <a:spcPts val="0"/>
+              </a:spcAft>
+              <a:buClrTx/>
+              <a:buSzTx/>
+              <a:buFontTx/>
+              <a:buNone/>
+              <a:tabLst/>
+              <a:defRPr/>
+            </a:pPr>
+            <a:r>
+              <a:rPr lang="fr-MA" sz="1200" kern="1200" dirty="0">
+                <a:solidFill>
+                  <a:schemeClr val="tx1"/>
+                </a:solidFill>
+                <a:effectLst/>
+                <a:latin typeface="+mn-lt"/>
+                <a:ea typeface="+mn-ea"/>
+                <a:cs typeface="+mn-cs"/>
+              </a:rPr>
+              <a:t>Enfin, je remercie mes camarades de promotion pour les échanges enrichissants, l'entraide et la dynamique collaborative qui ont rendu cette expérience encore plus formatrice.</a:t>
+            </a:r>
+          </a:p>
+          <a:p>
+            <a:endParaRPr lang="fr-MA" dirty="0"/>
+          </a:p>
+        </p:txBody>
+      </p:sp>
+    </p:spTree>
+    <p:extLst>
+      <p:ext uri="{BB962C8B-B14F-4D97-AF65-F5344CB8AC3E}">
+        <p14:creationId xmlns:p14="http://schemas.microsoft.com/office/powerpoint/2010/main" val="3452654810"/>
       </p:ext>
     </p:extLst>
   </p:cSld>
@@ -21218,13 +21422,13 @@
   <p:clrMapOvr>
     <a:masterClrMapping/>
   </p:clrMapOvr>
-  <mc:AlternateContent xmlns:mc="http://schemas.openxmlformats.org/markup-compatibility/2006">
-    <mc:Choice xmlns:p159="http://schemas.microsoft.com/office/powerpoint/2015/09/main" Requires="p159">
+  <mc:AlternateContent xmlns:mc="http://schemas.openxmlformats.org/markup-compatibility/2006" xmlns:p159="http://schemas.microsoft.com/office/powerpoint/2015/09/main">
+    <mc:Choice Requires="p159">
       <p:transition xmlns:p14="http://schemas.microsoft.com/office/powerpoint/2010/main" spd="slow" p14:dur="2000">
         <p159:morph option="byObject"/>
       </p:transition>
     </mc:Choice>
-    <mc:Fallback>
+    <mc:Fallback xmlns="">
       <p:transition spd="slow">
         <p:fade/>
       </p:transition>
@@ -26015,7 +26219,7 @@
     <p:bg>
       <p:bgPr>
         <a:blipFill>
-          <a:blip r:embed="rId2">
+          <a:blip r:embed="rId3">
             <a:duotone>
               <a:schemeClr val="bg2">
                 <a:shade val="88000"/>
@@ -26074,7 +26278,7 @@
           </p:nvPr>
         </p:nvPicPr>
         <p:blipFill>
-          <a:blip r:embed="rId3">
+          <a:blip r:embed="rId4">
             <a:alphaModFix amt="30000"/>
             <a:extLst>
               <a:ext uri="{28A0092B-C50C-407E-A947-70E740481C1C}">
@@ -31580,7 +31784,7 @@
           <p:nvPr/>
         </p:nvPicPr>
         <p:blipFill>
-          <a:blip r:embed="rId4"/>
+          <a:blip r:embed="rId5"/>
           <a:srcRect t="41402" b="39042"/>
           <a:stretch>
             <a:fillRect/>
@@ -31611,7 +31815,7 @@
           <p:nvPr/>
         </p:nvPicPr>
         <p:blipFill rotWithShape="1">
-          <a:blip r:embed="rId5">
+          <a:blip r:embed="rId6">
             <a:extLst>
               <a:ext uri="{28A0092B-C50C-407E-A947-70E740481C1C}">
                 <a14:useLocalDpi xmlns:a14="http://schemas.microsoft.com/office/drawing/2010/main" val="0"/>
@@ -31654,7 +31858,7 @@
           <p:nvPr/>
         </p:nvPicPr>
         <p:blipFill>
-          <a:blip r:embed="rId6">
+          <a:blip r:embed="rId7">
             <a:extLst>
               <a:ext uri="{28A0092B-C50C-407E-A947-70E740481C1C}">
                 <a14:useLocalDpi xmlns:a14="http://schemas.microsoft.com/office/drawing/2010/main" val="0"/>
@@ -31695,13 +31899,13 @@
   <p:clrMapOvr>
     <a:masterClrMapping/>
   </p:clrMapOvr>
-  <mc:AlternateContent xmlns:mc="http://schemas.openxmlformats.org/markup-compatibility/2006">
-    <mc:Choice xmlns:p159="http://schemas.microsoft.com/office/powerpoint/2015/09/main" Requires="p159">
+  <mc:AlternateContent xmlns:mc="http://schemas.openxmlformats.org/markup-compatibility/2006" xmlns:p159="http://schemas.microsoft.com/office/powerpoint/2015/09/main">
+    <mc:Choice Requires="p159">
       <p:transition xmlns:p14="http://schemas.microsoft.com/office/powerpoint/2010/main" spd="slow" p14:dur="2000">
         <p159:morph option="byObject"/>
       </p:transition>
     </mc:Choice>
-    <mc:Fallback>
+    <mc:Fallback xmlns="">
       <p:transition spd="slow">
         <p:fade/>
       </p:transition>
@@ -36928,13 +37132,13 @@
   <p:clrMapOvr>
     <a:masterClrMapping/>
   </p:clrMapOvr>
-  <mc:AlternateContent xmlns:mc="http://schemas.openxmlformats.org/markup-compatibility/2006">
-    <mc:Choice xmlns:p159="http://schemas.microsoft.com/office/powerpoint/2015/09/main" Requires="p159">
+  <mc:AlternateContent xmlns:mc="http://schemas.openxmlformats.org/markup-compatibility/2006" xmlns:p159="http://schemas.microsoft.com/office/powerpoint/2015/09/main">
+    <mc:Choice Requires="p159">
       <p:transition xmlns:p14="http://schemas.microsoft.com/office/powerpoint/2010/main" spd="slow" p14:dur="2000">
         <p159:morph option="byObject"/>
       </p:transition>
     </mc:Choice>
-    <mc:Fallback>
+    <mc:Fallback xmlns="">
       <p:transition spd="slow">
         <p:fade/>
       </p:transition>
@@ -38039,13 +38243,13 @@
   <p:clrMapOvr>
     <a:masterClrMapping/>
   </p:clrMapOvr>
-  <mc:AlternateContent xmlns:mc="http://schemas.openxmlformats.org/markup-compatibility/2006">
-    <mc:Choice xmlns:p159="http://schemas.microsoft.com/office/powerpoint/2015/09/main" Requires="p159">
+  <mc:AlternateContent xmlns:mc="http://schemas.openxmlformats.org/markup-compatibility/2006" xmlns:p159="http://schemas.microsoft.com/office/powerpoint/2015/09/main">
+    <mc:Choice Requires="p159">
       <p:transition xmlns:p14="http://schemas.microsoft.com/office/powerpoint/2010/main" spd="slow" p14:dur="2000">
         <p159:morph option="byObject"/>
       </p:transition>
     </mc:Choice>
-    <mc:Fallback>
+    <mc:Fallback xmlns="">
       <p:transition spd="slow">
         <p:fade/>
       </p:transition>
@@ -40390,13 +40594,13 @@
   <p:clrMapOvr>
     <a:masterClrMapping/>
   </p:clrMapOvr>
-  <mc:AlternateContent xmlns:mc="http://schemas.openxmlformats.org/markup-compatibility/2006">
-    <mc:Choice xmlns:p159="http://schemas.microsoft.com/office/powerpoint/2015/09/main" Requires="p159">
+  <mc:AlternateContent xmlns:mc="http://schemas.openxmlformats.org/markup-compatibility/2006" xmlns:p159="http://schemas.microsoft.com/office/powerpoint/2015/09/main">
+    <mc:Choice Requires="p159">
       <p:transition xmlns:p14="http://schemas.microsoft.com/office/powerpoint/2010/main" spd="slow" p14:dur="2000">
         <p159:morph option="byObject"/>
       </p:transition>
     </mc:Choice>
-    <mc:Fallback>
+    <mc:Fallback xmlns="">
       <p:transition spd="slow">
         <p:fade/>
       </p:transition>
